--- a/INCLUSIVE_Analysis_forPublication/Model Comparisons/FluxComparisons_2026-04-16_v1.pptx
+++ b/INCLUSIVE_Analysis_forPublication/Model Comparisons/FluxComparisons_2026-04-16_v1.pptx
@@ -8,6 +8,8 @@
     <p:sldId id="256" r:id="rId2"/>
     <p:sldId id="257" r:id="rId3"/>
     <p:sldId id="258" r:id="rId4"/>
+    <p:sldId id="259" r:id="rId5"/>
+    <p:sldId id="260" r:id="rId6"/>
   </p:sldIdLst>
   <p:sldSz cx="12192000" cy="6858000"/>
   <p:notesSz cx="6858000" cy="9144000"/>
@@ -3617,15 +3619,62 @@
             <p:ph idx="1"/>
           </p:nvPr>
         </p:nvSpPr>
-        <p:spPr/>
-        <p:txBody>
-          <a:bodyPr/>
+        <p:spPr>
+          <a:xfrm>
+            <a:off x="342900" y="1825624"/>
+            <a:ext cx="5421086" cy="4803775"/>
+          </a:xfrm>
+        </p:spPr>
+        <p:txBody>
+          <a:bodyPr>
+            <a:normAutofit/>
+          </a:bodyPr>
           <a:lstStyle/>
           <a:p>
             <a:r>
               <a:rPr lang="en-US" dirty="0"/>
-              <a:t>s</a:t>
-            </a:r>
+              <a:t>Black is the nu LE flux from FRW</a:t>
+            </a:r>
+          </a:p>
+          <a:p>
+            <a:r>
+              <a:rPr lang="en-US" dirty="0"/>
+              <a:t>Red is the LE flux from the tutorial: </a:t>
+            </a:r>
+            <a:r>
+              <a:rPr lang="en-US" dirty="0" err="1"/>
+              <a:t>minerva_le_flux.root</a:t>
+            </a:r>
+            <a:r>
+              <a:rPr lang="en-US" dirty="0"/>
+              <a:t> </a:t>
+            </a:r>
+          </a:p>
+          <a:p>
+            <a:r>
+              <a:rPr lang="en-US" dirty="0"/>
+              <a:t>For comparison, the red flux from the </a:t>
+            </a:r>
+            <a:r>
+              <a:rPr lang="en-US" dirty="0" err="1"/>
+              <a:t>tutorlal</a:t>
+            </a:r>
+            <a:r>
+              <a:rPr lang="en-US" dirty="0"/>
+              <a:t> is plotted after it has been bin width normalized (since it was the un-bin normalized flux) and it was scaled 1e-6 since it was per 10^6 POT</a:t>
+            </a:r>
+          </a:p>
+          <a:p>
+            <a:r>
+              <a:rPr lang="en-US" dirty="0">
+                <a:sym typeface="Wingdings" pitchFamily="2" charset="2"/>
+              </a:rPr>
+              <a:t> Perfect match essentially</a:t>
+            </a:r>
+            <a:endParaRPr lang="en-US" dirty="0"/>
+          </a:p>
+          <a:p>
+            <a:endParaRPr lang="en-US" dirty="0"/>
           </a:p>
         </p:txBody>
       </p:sp>
@@ -3651,8 +3700,8 @@
         </p:blipFill>
         <p:spPr>
           <a:xfrm>
-            <a:off x="5476215" y="1690688"/>
-            <a:ext cx="6715785" cy="4770664"/>
+            <a:off x="5876557" y="1825625"/>
+            <a:ext cx="6315443" cy="4486275"/>
           </a:xfrm>
           <a:prstGeom prst="rect">
             <a:avLst/>
@@ -3663,6 +3712,344 @@
     <p:extLst>
       <p:ext uri="{BB962C8B-B14F-4D97-AF65-F5344CB8AC3E}">
         <p14:creationId xmlns:p14="http://schemas.microsoft.com/office/powerpoint/2010/main" val="4079212143"/>
+      </p:ext>
+    </p:extLst>
+  </p:cSld>
+  <p:clrMapOvr>
+    <a:masterClrMapping/>
+  </p:clrMapOvr>
+</p:sld>
+</file>
+
+<file path=ppt/slides/slide4.xml><?xml version="1.0" encoding="utf-8"?>
+<p:sld xmlns:a="http://schemas.openxmlformats.org/drawingml/2006/main" xmlns:r="http://schemas.openxmlformats.org/officeDocument/2006/relationships" xmlns:p="http://schemas.openxmlformats.org/presentationml/2006/main">
+  <p:cSld>
+    <p:spTree>
+      <p:nvGrpSpPr>
+        <p:cNvPr id="1" name=""/>
+        <p:cNvGrpSpPr/>
+        <p:nvPr/>
+      </p:nvGrpSpPr>
+      <p:grpSpPr>
+        <a:xfrm>
+          <a:off x="0" y="0"/>
+          <a:ext cx="0" cy="0"/>
+          <a:chOff x="0" y="0"/>
+          <a:chExt cx="0" cy="0"/>
+        </a:xfrm>
+      </p:grpSpPr>
+      <p:sp>
+        <p:nvSpPr>
+          <p:cNvPr id="2" name="Title 1">
+            <a:extLst>
+              <a:ext uri="{FF2B5EF4-FFF2-40B4-BE49-F238E27FC236}">
+                <a16:creationId xmlns:a16="http://schemas.microsoft.com/office/drawing/2014/main" id="{C0C8765C-78F6-5CAC-85F8-1C9D4597A8FC}"/>
+              </a:ext>
+            </a:extLst>
+          </p:cNvPr>
+          <p:cNvSpPr>
+            <a:spLocks noGrp="1"/>
+          </p:cNvSpPr>
+          <p:nvPr>
+            <p:ph type="title"/>
+          </p:nvPr>
+        </p:nvSpPr>
+        <p:spPr/>
+        <p:txBody>
+          <a:bodyPr/>
+          <a:lstStyle/>
+          <a:p>
+            <a:r>
+              <a:rPr lang="en-US" dirty="0"/>
+              <a:t>My own </a:t>
+            </a:r>
+            <a:r>
+              <a:rPr lang="en-US" dirty="0" err="1"/>
+              <a:t>rebinning</a:t>
+            </a:r>
+            <a:r>
+              <a:rPr lang="en-US" dirty="0"/>
+              <a:t>  - ME, neutrino</a:t>
+            </a:r>
+          </a:p>
+        </p:txBody>
+      </p:sp>
+      <p:sp>
+        <p:nvSpPr>
+          <p:cNvPr id="3" name="Content Placeholder 2">
+            <a:extLst>
+              <a:ext uri="{FF2B5EF4-FFF2-40B4-BE49-F238E27FC236}">
+                <a16:creationId xmlns:a16="http://schemas.microsoft.com/office/drawing/2014/main" id="{54DD1F11-F465-87EA-51AC-E62021C9282C}"/>
+              </a:ext>
+            </a:extLst>
+          </p:cNvPr>
+          <p:cNvSpPr>
+            <a:spLocks noGrp="1"/>
+          </p:cNvSpPr>
+          <p:nvPr>
+            <p:ph idx="1"/>
+          </p:nvPr>
+        </p:nvSpPr>
+        <p:spPr>
+          <a:xfrm>
+            <a:off x="838200" y="1825625"/>
+            <a:ext cx="4991100" cy="4351338"/>
+          </a:xfrm>
+        </p:spPr>
+        <p:txBody>
+          <a:bodyPr/>
+          <a:lstStyle/>
+          <a:p>
+            <a:r>
+              <a:rPr lang="en-US" dirty="0"/>
+              <a:t>FRW </a:t>
+            </a:r>
+            <a:r>
+              <a:rPr lang="en-US" dirty="0" err="1"/>
+              <a:t>numu</a:t>
+            </a:r>
+            <a:r>
+              <a:rPr lang="en-US" dirty="0"/>
+              <a:t> is red</a:t>
+            </a:r>
+          </a:p>
+          <a:p>
+            <a:r>
+              <a:rPr lang="en-US" dirty="0"/>
+              <a:t>My </a:t>
+            </a:r>
+            <a:r>
+              <a:rPr lang="en-US" dirty="0" err="1"/>
+              <a:t>rebinned</a:t>
+            </a:r>
+            <a:r>
+              <a:rPr lang="en-US" dirty="0"/>
+              <a:t> </a:t>
+            </a:r>
+            <a:r>
+              <a:rPr lang="en-US" dirty="0" err="1"/>
+              <a:t>numu</a:t>
+            </a:r>
+            <a:r>
+              <a:rPr lang="en-US" dirty="0"/>
+              <a:t> is black</a:t>
+            </a:r>
+          </a:p>
+          <a:p>
+            <a:pPr lvl="1"/>
+            <a:r>
+              <a:rPr lang="en-US" dirty="0"/>
+              <a:t>Had to bin width normalize mine before plotting here since NUISANCE wants it NOT bin width normalized whereas the FRW flux is bin width normalized</a:t>
+            </a:r>
+          </a:p>
+        </p:txBody>
+      </p:sp>
+      <p:pic>
+        <p:nvPicPr>
+          <p:cNvPr id="5" name="Picture 4" descr="A graph of a number of numbers&#10;&#10;AI-generated content may be incorrect.">
+            <a:extLst>
+              <a:ext uri="{FF2B5EF4-FFF2-40B4-BE49-F238E27FC236}">
+                <a16:creationId xmlns:a16="http://schemas.microsoft.com/office/drawing/2014/main" id="{6A2DDF50-E8A2-FB74-EDF2-4AEED83F960E}"/>
+              </a:ext>
+            </a:extLst>
+          </p:cNvPr>
+          <p:cNvPicPr>
+            <a:picLocks noChangeAspect="1"/>
+          </p:cNvPicPr>
+          <p:nvPr/>
+        </p:nvPicPr>
+        <p:blipFill>
+          <a:blip r:embed="rId2"/>
+          <a:stretch>
+            <a:fillRect/>
+          </a:stretch>
+        </p:blipFill>
+        <p:spPr>
+          <a:xfrm>
+            <a:off x="5829300" y="1482725"/>
+            <a:ext cx="6240343" cy="4215946"/>
+          </a:xfrm>
+          <a:prstGeom prst="rect">
+            <a:avLst/>
+          </a:prstGeom>
+        </p:spPr>
+      </p:pic>
+    </p:spTree>
+    <p:extLst>
+      <p:ext uri="{BB962C8B-B14F-4D97-AF65-F5344CB8AC3E}">
+        <p14:creationId xmlns:p14="http://schemas.microsoft.com/office/powerpoint/2010/main" val="972537005"/>
+      </p:ext>
+    </p:extLst>
+  </p:cSld>
+  <p:clrMapOvr>
+    <a:masterClrMapping/>
+  </p:clrMapOvr>
+</p:sld>
+</file>
+
+<file path=ppt/slides/slide5.xml><?xml version="1.0" encoding="utf-8"?>
+<p:sld xmlns:a="http://schemas.openxmlformats.org/drawingml/2006/main" xmlns:r="http://schemas.openxmlformats.org/officeDocument/2006/relationships" xmlns:p="http://schemas.openxmlformats.org/presentationml/2006/main">
+  <p:cSld>
+    <p:spTree>
+      <p:nvGrpSpPr>
+        <p:cNvPr id="1" name="">
+          <a:extLst>
+            <a:ext uri="{FF2B5EF4-FFF2-40B4-BE49-F238E27FC236}">
+              <a16:creationId xmlns:a16="http://schemas.microsoft.com/office/drawing/2014/main" id="{ED322840-9869-A5D0-9CB8-190DC0ADB859}"/>
+            </a:ext>
+          </a:extLst>
+        </p:cNvPr>
+        <p:cNvGrpSpPr/>
+        <p:nvPr/>
+      </p:nvGrpSpPr>
+      <p:grpSpPr>
+        <a:xfrm>
+          <a:off x="0" y="0"/>
+          <a:ext cx="0" cy="0"/>
+          <a:chOff x="0" y="0"/>
+          <a:chExt cx="0" cy="0"/>
+        </a:xfrm>
+      </p:grpSpPr>
+      <p:sp>
+        <p:nvSpPr>
+          <p:cNvPr id="2" name="Title 1">
+            <a:extLst>
+              <a:ext uri="{FF2B5EF4-FFF2-40B4-BE49-F238E27FC236}">
+                <a16:creationId xmlns:a16="http://schemas.microsoft.com/office/drawing/2014/main" id="{F8A61B56-46BC-0192-9DC1-D97A79EFC1AE}"/>
+              </a:ext>
+            </a:extLst>
+          </p:cNvPr>
+          <p:cNvSpPr>
+            <a:spLocks noGrp="1"/>
+          </p:cNvSpPr>
+          <p:nvPr>
+            <p:ph type="title"/>
+          </p:nvPr>
+        </p:nvSpPr>
+        <p:spPr/>
+        <p:txBody>
+          <a:bodyPr/>
+          <a:lstStyle/>
+          <a:p>
+            <a:r>
+              <a:rPr lang="en-US" dirty="0"/>
+              <a:t>My own </a:t>
+            </a:r>
+            <a:r>
+              <a:rPr lang="en-US" dirty="0" err="1"/>
+              <a:t>rebinning</a:t>
+            </a:r>
+            <a:r>
+              <a:rPr lang="en-US" dirty="0"/>
+              <a:t> – ME, antineutrino</a:t>
+            </a:r>
+          </a:p>
+        </p:txBody>
+      </p:sp>
+      <p:sp>
+        <p:nvSpPr>
+          <p:cNvPr id="3" name="Content Placeholder 2">
+            <a:extLst>
+              <a:ext uri="{FF2B5EF4-FFF2-40B4-BE49-F238E27FC236}">
+                <a16:creationId xmlns:a16="http://schemas.microsoft.com/office/drawing/2014/main" id="{707E1A79-0BDA-70E3-16A6-B6FA5FEFC2A0}"/>
+              </a:ext>
+            </a:extLst>
+          </p:cNvPr>
+          <p:cNvSpPr>
+            <a:spLocks noGrp="1"/>
+          </p:cNvSpPr>
+          <p:nvPr>
+            <p:ph idx="1"/>
+          </p:nvPr>
+        </p:nvSpPr>
+        <p:spPr>
+          <a:xfrm>
+            <a:off x="838200" y="1825625"/>
+            <a:ext cx="4991100" cy="4351338"/>
+          </a:xfrm>
+        </p:spPr>
+        <p:txBody>
+          <a:bodyPr/>
+          <a:lstStyle/>
+          <a:p>
+            <a:r>
+              <a:rPr lang="en-US" dirty="0"/>
+              <a:t>FRW </a:t>
+            </a:r>
+            <a:r>
+              <a:rPr lang="en-US" dirty="0" err="1"/>
+              <a:t>numubar</a:t>
+            </a:r>
+            <a:r>
+              <a:rPr lang="en-US" dirty="0"/>
+              <a:t> is red</a:t>
+            </a:r>
+          </a:p>
+          <a:p>
+            <a:r>
+              <a:rPr lang="en-US" dirty="0"/>
+              <a:t>My </a:t>
+            </a:r>
+            <a:r>
+              <a:rPr lang="en-US" dirty="0" err="1"/>
+              <a:t>rebinned</a:t>
+            </a:r>
+            <a:r>
+              <a:rPr lang="en-US" dirty="0"/>
+              <a:t> </a:t>
+            </a:r>
+            <a:r>
+              <a:rPr lang="en-US" dirty="0" err="1"/>
+              <a:t>numubar</a:t>
+            </a:r>
+            <a:r>
+              <a:rPr lang="en-US" dirty="0"/>
+              <a:t> is black</a:t>
+            </a:r>
+          </a:p>
+          <a:p>
+            <a:pPr lvl="1"/>
+            <a:r>
+              <a:rPr lang="en-US" dirty="0"/>
+              <a:t>Had to bin width normalize mine before plotting here since NUISANCE wants it NOT bin width normalized whereas the FRW flux is bin width normalized</a:t>
+            </a:r>
+          </a:p>
+        </p:txBody>
+      </p:sp>
+      <p:pic>
+        <p:nvPicPr>
+          <p:cNvPr id="6" name="Picture 5" descr="A graph of a graph&#10;&#10;AI-generated content may be incorrect.">
+            <a:extLst>
+              <a:ext uri="{FF2B5EF4-FFF2-40B4-BE49-F238E27FC236}">
+                <a16:creationId xmlns:a16="http://schemas.microsoft.com/office/drawing/2014/main" id="{C34EB844-0853-206A-2EE1-AE0FEBC5FD3E}"/>
+              </a:ext>
+            </a:extLst>
+          </p:cNvPr>
+          <p:cNvPicPr>
+            <a:picLocks noChangeAspect="1"/>
+          </p:cNvPicPr>
+          <p:nvPr/>
+        </p:nvPicPr>
+        <p:blipFill>
+          <a:blip r:embed="rId2"/>
+          <a:stretch>
+            <a:fillRect/>
+          </a:stretch>
+        </p:blipFill>
+        <p:spPr>
+          <a:xfrm>
+            <a:off x="5692930" y="1494744"/>
+            <a:ext cx="6180662" cy="4486275"/>
+          </a:xfrm>
+          <a:prstGeom prst="rect">
+            <a:avLst/>
+          </a:prstGeom>
+        </p:spPr>
+      </p:pic>
+    </p:spTree>
+    <p:extLst>
+      <p:ext uri="{BB962C8B-B14F-4D97-AF65-F5344CB8AC3E}">
+        <p14:creationId xmlns:p14="http://schemas.microsoft.com/office/powerpoint/2010/main" val="2261194323"/>
       </p:ext>
     </p:extLst>
   </p:cSld>
